--- a/dapr3_lectures/block2_fa/img_sandbox/pca_firstlook.pptx
+++ b/dapr3_lectures/block2_fa/img_sandbox/pca_firstlook.pptx
@@ -104,6 +104,11 @@
       </a:defRPr>
     </a:lvl9pPr>
   </p:defaultTextStyle>
+  <p:extLst>
+    <p:ext uri="{EFAFB233-063F-42B5-8137-9DF3F51BA10A}">
+      <p15:sldGuideLst xmlns:p15="http://schemas.microsoft.com/office/powerpoint/2012/main"/>
+    </p:ext>
+  </p:extLst>
 </p:presentation>
 </file>
 
@@ -256,7 +261,7 @@
           <a:p>
             <a:fld id="{CCA70DF9-C7AF-4A71-9428-E677F4208D4C}" type="datetimeFigureOut">
               <a:rPr lang="en-GB" smtClean="0"/>
-              <a:t>13/04/2026</a:t>
+              <a:t>25/08/2026</a:t>
             </a:fld>
             <a:endParaRPr lang="en-GB"/>
           </a:p>
@@ -456,7 +461,7 @@
           <a:p>
             <a:fld id="{CCA70DF9-C7AF-4A71-9428-E677F4208D4C}" type="datetimeFigureOut">
               <a:rPr lang="en-GB" smtClean="0"/>
-              <a:t>13/04/2026</a:t>
+              <a:t>25/08/2026</a:t>
             </a:fld>
             <a:endParaRPr lang="en-GB"/>
           </a:p>
@@ -666,7 +671,7 @@
           <a:p>
             <a:fld id="{CCA70DF9-C7AF-4A71-9428-E677F4208D4C}" type="datetimeFigureOut">
               <a:rPr lang="en-GB" smtClean="0"/>
-              <a:t>13/04/2026</a:t>
+              <a:t>25/08/2026</a:t>
             </a:fld>
             <a:endParaRPr lang="en-GB"/>
           </a:p>
@@ -866,7 +871,7 @@
           <a:p>
             <a:fld id="{CCA70DF9-C7AF-4A71-9428-E677F4208D4C}" type="datetimeFigureOut">
               <a:rPr lang="en-GB" smtClean="0"/>
-              <a:t>13/04/2026</a:t>
+              <a:t>25/08/2026</a:t>
             </a:fld>
             <a:endParaRPr lang="en-GB"/>
           </a:p>
@@ -1142,7 +1147,7 @@
           <a:p>
             <a:fld id="{CCA70DF9-C7AF-4A71-9428-E677F4208D4C}" type="datetimeFigureOut">
               <a:rPr lang="en-GB" smtClean="0"/>
-              <a:t>13/04/2026</a:t>
+              <a:t>25/08/2026</a:t>
             </a:fld>
             <a:endParaRPr lang="en-GB"/>
           </a:p>
@@ -1410,7 +1415,7 @@
           <a:p>
             <a:fld id="{CCA70DF9-C7AF-4A71-9428-E677F4208D4C}" type="datetimeFigureOut">
               <a:rPr lang="en-GB" smtClean="0"/>
-              <a:t>13/04/2026</a:t>
+              <a:t>25/08/2026</a:t>
             </a:fld>
             <a:endParaRPr lang="en-GB"/>
           </a:p>
@@ -1825,7 +1830,7 @@
           <a:p>
             <a:fld id="{CCA70DF9-C7AF-4A71-9428-E677F4208D4C}" type="datetimeFigureOut">
               <a:rPr lang="en-GB" smtClean="0"/>
-              <a:t>13/04/2026</a:t>
+              <a:t>25/08/2026</a:t>
             </a:fld>
             <a:endParaRPr lang="en-GB"/>
           </a:p>
@@ -1967,7 +1972,7 @@
           <a:p>
             <a:fld id="{CCA70DF9-C7AF-4A71-9428-E677F4208D4C}" type="datetimeFigureOut">
               <a:rPr lang="en-GB" smtClean="0"/>
-              <a:t>13/04/2026</a:t>
+              <a:t>25/08/2026</a:t>
             </a:fld>
             <a:endParaRPr lang="en-GB"/>
           </a:p>
@@ -2080,7 +2085,7 @@
           <a:p>
             <a:fld id="{CCA70DF9-C7AF-4A71-9428-E677F4208D4C}" type="datetimeFigureOut">
               <a:rPr lang="en-GB" smtClean="0"/>
-              <a:t>13/04/2026</a:t>
+              <a:t>25/08/2026</a:t>
             </a:fld>
             <a:endParaRPr lang="en-GB"/>
           </a:p>
@@ -2393,7 +2398,7 @@
           <a:p>
             <a:fld id="{CCA70DF9-C7AF-4A71-9428-E677F4208D4C}" type="datetimeFigureOut">
               <a:rPr lang="en-GB" smtClean="0"/>
-              <a:t>13/04/2026</a:t>
+              <a:t>25/08/2026</a:t>
             </a:fld>
             <a:endParaRPr lang="en-GB"/>
           </a:p>
@@ -2682,7 +2687,7 @@
           <a:p>
             <a:fld id="{CCA70DF9-C7AF-4A71-9428-E677F4208D4C}" type="datetimeFigureOut">
               <a:rPr lang="en-GB" smtClean="0"/>
-              <a:t>13/04/2026</a:t>
+              <a:t>25/08/2026</a:t>
             </a:fld>
             <a:endParaRPr lang="en-GB"/>
           </a:p>
@@ -2925,7 +2930,7 @@
           <a:p>
             <a:fld id="{CCA70DF9-C7AF-4A71-9428-E677F4208D4C}" type="datetimeFigureOut">
               <a:rPr lang="en-GB" smtClean="0"/>
-              <a:t>13/04/2026</a:t>
+              <a:t>25/08/2026</a:t>
             </a:fld>
             <a:endParaRPr lang="en-GB"/>
           </a:p>
@@ -3550,291 +3555,349 @@
           </a:p>
         </p:txBody>
       </p:sp>
-      <mc:AlternateContent xmlns:mc="http://schemas.openxmlformats.org/markup-compatibility/2006">
-        <mc:Choice xmlns:a14="http://schemas.microsoft.com/office/drawing/2010/main" Requires="a14">
-          <p:sp>
-            <p:nvSpPr>
-              <p:cNvPr id="9" name="TextBox 8">
-                <a:extLst>
-                  <a:ext uri="{FF2B5EF4-FFF2-40B4-BE49-F238E27FC236}">
-                    <a16:creationId xmlns:a16="http://schemas.microsoft.com/office/drawing/2014/main" id="{55625CE1-211B-4C9F-97BB-A47BB93085D6}"/>
-                  </a:ext>
-                </a:extLst>
-              </p:cNvPr>
-              <p:cNvSpPr txBox="1"/>
-              <p:nvPr/>
-            </p:nvSpPr>
-            <p:spPr>
-              <a:xfrm>
-                <a:off x="5787695" y="1773382"/>
-                <a:ext cx="6058069" cy="981744"/>
-              </a:xfrm>
-              <a:prstGeom prst="rect">
-                <a:avLst/>
-              </a:prstGeom>
-              <a:noFill/>
-            </p:spPr>
-            <p:txBody>
-              <a:bodyPr wrap="none" rtlCol="0">
-                <a:spAutoFit/>
-              </a:bodyPr>
-              <a:lstStyle/>
-              <a:p>
-                <a:r>
-                  <a:rPr lang="en-GB" b="1" dirty="0">
-                    <a:solidFill>
-                      <a:srgbClr val="FF0000"/>
-                    </a:solidFill>
-                  </a:rPr>
-                  <a:t>“loadings”</a:t>
-                </a:r>
-              </a:p>
-              <a:p>
-                <a:pPr marL="285750" indent="-285750">
-                  <a:buFontTx/>
-                  <a:buChar char="-"/>
-                </a:pPr>
-                <a:r>
-                  <a:rPr lang="en-GB" dirty="0">
-                    <a:solidFill>
-                      <a:srgbClr val="FF0000"/>
-                    </a:solidFill>
-                  </a:rPr>
-                  <a:t>directions of each dimension (relative to original variables)</a:t>
-                </a:r>
-              </a:p>
-              <a:p>
-                <a:pPr marL="285750" indent="-285750">
-                  <a:buFontTx/>
-                  <a:buChar char="-"/>
-                </a:pPr>
-                <a14:m>
-                  <m:oMath xmlns:m="http://schemas.openxmlformats.org/officeDocument/2006/math">
-                    <m:r>
-                      <a:rPr lang="en-GB" b="0" i="1" smtClean="0">
-                        <a:solidFill>
-                          <a:srgbClr val="FF0000"/>
-                        </a:solidFill>
-                        <a:latin typeface="Cambria Math" panose="02040503050406030204" pitchFamily="18" charset="0"/>
-                      </a:rPr>
-                      <m:t>𝑒𝑖𝑔𝑒𝑛𝑣𝑒𝑐𝑡𝑜𝑟</m:t>
-                    </m:r>
-                    <m:r>
-                      <a:rPr lang="en-GB" i="1" smtClean="0">
-                        <a:solidFill>
-                          <a:srgbClr val="FF0000"/>
-                        </a:solidFill>
-                        <a:latin typeface="Cambria Math" panose="02040503050406030204" pitchFamily="18" charset="0"/>
-                        <a:ea typeface="Cambria Math" panose="02040503050406030204" pitchFamily="18" charset="0"/>
-                      </a:rPr>
-                      <m:t>×</m:t>
-                    </m:r>
-                    <m:rad>
-                      <m:radPr>
-                        <m:degHide m:val="on"/>
-                        <m:ctrlPr>
-                          <a:rPr lang="en-GB" i="1" smtClean="0">
-                            <a:solidFill>
-                              <a:srgbClr val="FF0000"/>
-                            </a:solidFill>
-                            <a:latin typeface="Cambria Math" panose="02040503050406030204" pitchFamily="18" charset="0"/>
-                          </a:rPr>
-                        </m:ctrlPr>
-                      </m:radPr>
-                      <m:deg/>
-                      <m:e>
-                        <m:r>
-                          <a:rPr lang="en-GB" b="0" i="1" smtClean="0">
-                            <a:solidFill>
-                              <a:srgbClr val="FF0000"/>
-                            </a:solidFill>
-                            <a:latin typeface="Cambria Math" panose="02040503050406030204" pitchFamily="18" charset="0"/>
-                          </a:rPr>
-                          <m:t>𝑒𝑖𝑔𝑒𝑛𝑣𝑎𝑙𝑢𝑒</m:t>
-                        </m:r>
-                      </m:e>
-                    </m:rad>
-                  </m:oMath>
-                </a14:m>
-                <a:endParaRPr lang="en-GB" dirty="0">
-                  <a:solidFill>
-                    <a:srgbClr val="FF0000"/>
-                  </a:solidFill>
-                </a:endParaRPr>
-              </a:p>
-            </p:txBody>
-          </p:sp>
-        </mc:Choice>
-        <mc:Fallback>
-          <p:sp>
-            <p:nvSpPr>
-              <p:cNvPr id="9" name="TextBox 8">
-                <a:extLst>
-                  <a:ext uri="{FF2B5EF4-FFF2-40B4-BE49-F238E27FC236}">
-                    <a16:creationId xmlns:a16="http://schemas.microsoft.com/office/drawing/2014/main" id="{55625CE1-211B-4C9F-97BB-A47BB93085D6}"/>
-                  </a:ext>
-                </a:extLst>
-              </p:cNvPr>
-              <p:cNvSpPr txBox="1">
-                <a:spLocks noRot="1" noChangeAspect="1" noMove="1" noResize="1" noEditPoints="1" noAdjustHandles="1" noChangeArrowheads="1" noChangeShapeType="1" noTextEdit="1"/>
-              </p:cNvSpPr>
-              <p:nvPr/>
-            </p:nvSpPr>
-            <p:spPr>
-              <a:xfrm>
-                <a:off x="5787695" y="1773382"/>
-                <a:ext cx="6058069" cy="981744"/>
-              </a:xfrm>
-              <a:prstGeom prst="rect">
-                <a:avLst/>
-              </a:prstGeom>
-              <a:blipFill>
-                <a:blip r:embed="rId3"/>
-                <a:stretch>
-                  <a:fillRect l="-805" t="-3727" b="-6211"/>
-                </a:stretch>
-              </a:blipFill>
-            </p:spPr>
-            <p:txBody>
-              <a:bodyPr/>
-              <a:lstStyle/>
-              <a:p>
-                <a:r>
-                  <a:rPr lang="en-GB">
-                    <a:noFill/>
-                  </a:rPr>
-                  <a:t> </a:t>
-                </a:r>
-              </a:p>
-            </p:txBody>
-          </p:sp>
-        </mc:Fallback>
-      </mc:AlternateContent>
-      <mc:AlternateContent xmlns:mc="http://schemas.openxmlformats.org/markup-compatibility/2006">
-        <mc:Choice xmlns:a14="http://schemas.microsoft.com/office/drawing/2010/main" Requires="a14">
-          <p:sp>
-            <p:nvSpPr>
-              <p:cNvPr id="10" name="TextBox 9">
-                <a:extLst>
-                  <a:ext uri="{FF2B5EF4-FFF2-40B4-BE49-F238E27FC236}">
-                    <a16:creationId xmlns:a16="http://schemas.microsoft.com/office/drawing/2014/main" id="{8C31E319-0932-45D7-BE4E-79F026FBD4B6}"/>
-                  </a:ext>
-                </a:extLst>
-              </p:cNvPr>
-              <p:cNvSpPr txBox="1"/>
-              <p:nvPr/>
-            </p:nvSpPr>
-            <p:spPr>
-              <a:xfrm>
-                <a:off x="5787695" y="3144903"/>
-                <a:ext cx="3267241" cy="923330"/>
-              </a:xfrm>
-              <a:prstGeom prst="rect">
-                <a:avLst/>
-              </a:prstGeom>
-              <a:noFill/>
-            </p:spPr>
-            <p:txBody>
-              <a:bodyPr wrap="none" rtlCol="0">
-                <a:spAutoFit/>
-              </a:bodyPr>
-              <a:lstStyle/>
-              <a:p>
-                <a:r>
-                  <a:rPr lang="en-GB" b="1" dirty="0">
-                    <a:solidFill>
-                      <a:srgbClr val="FF0000"/>
-                    </a:solidFill>
-                  </a:rPr>
-                  <a:t>“variance accounted for”</a:t>
-                </a:r>
-              </a:p>
-              <a:p>
-                <a:pPr marL="285750" indent="-285750">
-                  <a:buFontTx/>
-                  <a:buChar char="-"/>
-                </a:pPr>
-                <a:r>
-                  <a:rPr lang="en-GB" dirty="0">
-                    <a:solidFill>
-                      <a:srgbClr val="FF0000"/>
-                    </a:solidFill>
-                  </a:rPr>
-                  <a:t>magnitude of each dimension</a:t>
-                </a:r>
-              </a:p>
-              <a:p>
-                <a:pPr marL="285750" indent="-285750">
-                  <a:buFontTx/>
-                  <a:buChar char="-"/>
-                </a:pPr>
-                <a14:m>
-                  <m:oMath xmlns:m="http://schemas.openxmlformats.org/officeDocument/2006/math">
-                    <m:r>
-                      <a:rPr lang="en-GB" b="0" i="1" smtClean="0">
-                        <a:solidFill>
-                          <a:srgbClr val="FF0000"/>
-                        </a:solidFill>
-                        <a:latin typeface="Cambria Math" panose="02040503050406030204" pitchFamily="18" charset="0"/>
-                      </a:rPr>
-                      <m:t>𝑒𝑖𝑔𝑒𝑛𝑣𝑎𝑙𝑢𝑒</m:t>
-                    </m:r>
-                  </m:oMath>
-                </a14:m>
-                <a:endParaRPr lang="en-GB" dirty="0">
-                  <a:solidFill>
-                    <a:srgbClr val="FF0000"/>
-                  </a:solidFill>
-                </a:endParaRPr>
-              </a:p>
-            </p:txBody>
-          </p:sp>
-        </mc:Choice>
-        <mc:Fallback>
-          <p:sp>
-            <p:nvSpPr>
-              <p:cNvPr id="10" name="TextBox 9">
-                <a:extLst>
-                  <a:ext uri="{FF2B5EF4-FFF2-40B4-BE49-F238E27FC236}">
-                    <a16:creationId xmlns:a16="http://schemas.microsoft.com/office/drawing/2014/main" id="{8C31E319-0932-45D7-BE4E-79F026FBD4B6}"/>
-                  </a:ext>
-                </a:extLst>
-              </p:cNvPr>
-              <p:cNvSpPr txBox="1">
-                <a:spLocks noRot="1" noChangeAspect="1" noMove="1" noResize="1" noEditPoints="1" noAdjustHandles="1" noChangeArrowheads="1" noChangeShapeType="1" noTextEdit="1"/>
-              </p:cNvSpPr>
-              <p:nvPr/>
-            </p:nvSpPr>
-            <p:spPr>
-              <a:xfrm>
-                <a:off x="5787695" y="3144903"/>
-                <a:ext cx="3267241" cy="923330"/>
-              </a:xfrm>
-              <a:prstGeom prst="rect">
-                <a:avLst/>
-              </a:prstGeom>
-              <a:blipFill>
-                <a:blip r:embed="rId4"/>
-                <a:stretch>
-                  <a:fillRect l="-1493" t="-3974" r="-1119" b="-7947"/>
-                </a:stretch>
-              </a:blipFill>
-            </p:spPr>
-            <p:txBody>
-              <a:bodyPr/>
-              <a:lstStyle/>
-              <a:p>
-                <a:r>
-                  <a:rPr lang="en-GB">
-                    <a:noFill/>
-                  </a:rPr>
-                  <a:t> </a:t>
-                </a:r>
-              </a:p>
-            </p:txBody>
-          </p:sp>
-        </mc:Fallback>
-      </mc:AlternateContent>
+      <p:sp>
+        <p:nvSpPr>
+          <p:cNvPr id="9" name="TextBox 8">
+            <a:extLst>
+              <a:ext uri="{FF2B5EF4-FFF2-40B4-BE49-F238E27FC236}">
+                <a16:creationId xmlns:a16="http://schemas.microsoft.com/office/drawing/2014/main" id="{55625CE1-211B-4C9F-97BB-A47BB93085D6}"/>
+              </a:ext>
+            </a:extLst>
+          </p:cNvPr>
+          <p:cNvSpPr txBox="1"/>
+          <p:nvPr/>
+        </p:nvSpPr>
+        <p:spPr>
+          <a:xfrm>
+            <a:off x="5787695" y="1773382"/>
+            <a:ext cx="5968301" cy="1477328"/>
+          </a:xfrm>
+          <a:prstGeom prst="rect">
+            <a:avLst/>
+          </a:prstGeom>
+          <a:noFill/>
+        </p:spPr>
+        <p:txBody>
+          <a:bodyPr wrap="none" rtlCol="0">
+            <a:spAutoFit/>
+          </a:bodyPr>
+          <a:lstStyle/>
+          <a:p>
+            <a:r>
+              <a:rPr lang="en-GB" b="1" dirty="0">
+                <a:solidFill>
+                  <a:srgbClr val="FF0000"/>
+                </a:solidFill>
+              </a:rPr>
+              <a:t>“loadings”</a:t>
+            </a:r>
+          </a:p>
+          <a:p>
+            <a:pPr marL="285750" indent="-285750">
+              <a:buFontTx/>
+              <a:buChar char="-"/>
+            </a:pPr>
+            <a:r>
+              <a:rPr lang="en-GB" dirty="0">
+                <a:solidFill>
+                  <a:schemeClr val="accent6"/>
+                </a:solidFill>
+              </a:rPr>
+              <a:t>directions </a:t>
+            </a:r>
+            <a:r>
+              <a:rPr lang="en-GB" dirty="0">
+                <a:solidFill>
+                  <a:srgbClr val="FF0000"/>
+                </a:solidFill>
+              </a:rPr>
+              <a:t>of each dimension (relative to original variables)</a:t>
+            </a:r>
+          </a:p>
+          <a:p>
+            <a:pPr marL="285750" indent="-285750">
+              <a:buFontTx/>
+              <a:buChar char="-"/>
+            </a:pPr>
+            <a:r>
+              <a:rPr lang="en-GB" dirty="0">
+                <a:solidFill>
+                  <a:srgbClr val="FF0000"/>
+                </a:solidFill>
+              </a:rPr>
+              <a:t>Correlations between items and components: </a:t>
+            </a:r>
+            <a:r>
+              <a:rPr lang="en-GB" b="1" dirty="0">
+                <a:solidFill>
+                  <a:schemeClr val="accent6"/>
+                </a:solidFill>
+              </a:rPr>
+              <a:t>r</a:t>
+            </a:r>
+            <a:r>
+              <a:rPr lang="en-GB" b="1" baseline="-25000" dirty="0">
+                <a:solidFill>
+                  <a:schemeClr val="accent6"/>
+                </a:solidFill>
+              </a:rPr>
+              <a:t>Q1,PC1 </a:t>
+            </a:r>
+            <a:r>
+              <a:rPr lang="en-GB" b="1" dirty="0">
+                <a:solidFill>
+                  <a:schemeClr val="accent6"/>
+                </a:solidFill>
+              </a:rPr>
+              <a:t>= .91</a:t>
+            </a:r>
+            <a:endParaRPr lang="en-GB" b="1" baseline="-25000" dirty="0">
+              <a:solidFill>
+                <a:schemeClr val="accent6"/>
+              </a:solidFill>
+            </a:endParaRPr>
+          </a:p>
+          <a:p>
+            <a:pPr marL="285750" indent="-285750">
+              <a:buFontTx/>
+              <a:buChar char="-"/>
+            </a:pPr>
+            <a:r>
+              <a:rPr lang="en-GB" dirty="0">
+                <a:solidFill>
+                  <a:srgbClr val="FF0000"/>
+                </a:solidFill>
+              </a:rPr>
+              <a:t>Squaring them gives us proportion of variance in item </a:t>
+            </a:r>
+            <a:br>
+              <a:rPr lang="en-GB" dirty="0">
+                <a:solidFill>
+                  <a:srgbClr val="FF0000"/>
+                </a:solidFill>
+              </a:rPr>
+            </a:br>
+            <a:r>
+              <a:rPr lang="en-GB" dirty="0">
+                <a:solidFill>
+                  <a:srgbClr val="FF0000"/>
+                </a:solidFill>
+              </a:rPr>
+              <a:t>captured by each component: </a:t>
+            </a:r>
+            <a:r>
+              <a:rPr lang="en-GB" b="1" dirty="0">
+                <a:solidFill>
+                  <a:schemeClr val="accent6"/>
+                </a:solidFill>
+              </a:rPr>
+              <a:t>R</a:t>
+            </a:r>
+            <a:r>
+              <a:rPr lang="en-GB" b="1" baseline="30000" dirty="0">
+                <a:solidFill>
+                  <a:schemeClr val="accent6"/>
+                </a:solidFill>
+              </a:rPr>
+              <a:t>2</a:t>
+            </a:r>
+            <a:r>
+              <a:rPr lang="en-GB" b="1" baseline="-25000" dirty="0">
+                <a:solidFill>
+                  <a:schemeClr val="accent6"/>
+                </a:solidFill>
+              </a:rPr>
+              <a:t>Q1,PC1 </a:t>
+            </a:r>
+            <a:r>
+              <a:rPr lang="en-GB" b="1" dirty="0">
+                <a:solidFill>
+                  <a:schemeClr val="accent6"/>
+                </a:solidFill>
+              </a:rPr>
+              <a:t>= .83</a:t>
+            </a:r>
+          </a:p>
+        </p:txBody>
+      </p:sp>
+      <p:sp>
+        <p:nvSpPr>
+          <p:cNvPr id="10" name="TextBox 9">
+            <a:extLst>
+              <a:ext uri="{FF2B5EF4-FFF2-40B4-BE49-F238E27FC236}">
+                <a16:creationId xmlns:a16="http://schemas.microsoft.com/office/drawing/2014/main" id="{8C31E319-0932-45D7-BE4E-79F026FBD4B6}"/>
+              </a:ext>
+            </a:extLst>
+          </p:cNvPr>
+          <p:cNvSpPr txBox="1"/>
+          <p:nvPr/>
+        </p:nvSpPr>
+        <p:spPr>
+          <a:xfrm>
+            <a:off x="6095999" y="3189293"/>
+            <a:ext cx="5863385" cy="1477328"/>
+          </a:xfrm>
+          <a:prstGeom prst="rect">
+            <a:avLst/>
+          </a:prstGeom>
+          <a:noFill/>
+        </p:spPr>
+        <p:txBody>
+          <a:bodyPr wrap="square" rtlCol="0">
+            <a:spAutoFit/>
+          </a:bodyPr>
+          <a:lstStyle/>
+          <a:p>
+            <a:r>
+              <a:rPr lang="en-GB" b="1" dirty="0">
+                <a:solidFill>
+                  <a:srgbClr val="FF0000"/>
+                </a:solidFill>
+              </a:rPr>
+              <a:t>“variance accounted for”</a:t>
+            </a:r>
+          </a:p>
+          <a:p>
+            <a:pPr marL="285750" indent="-285750">
+              <a:buFontTx/>
+              <a:buChar char="-"/>
+            </a:pPr>
+            <a:r>
+              <a:rPr lang="en-GB" dirty="0">
+                <a:solidFill>
+                  <a:schemeClr val="accent6"/>
+                </a:solidFill>
+              </a:rPr>
+              <a:t>magnitude</a:t>
+            </a:r>
+            <a:r>
+              <a:rPr lang="en-GB" dirty="0">
+                <a:solidFill>
+                  <a:srgbClr val="FF0000"/>
+                </a:solidFill>
+              </a:rPr>
+              <a:t> of each dimension</a:t>
+            </a:r>
+          </a:p>
+          <a:p>
+            <a:pPr marL="285750" indent="-285750">
+              <a:buFontTx/>
+              <a:buChar char="-"/>
+            </a:pPr>
+            <a:r>
+              <a:rPr lang="en-GB" dirty="0">
+                <a:solidFill>
+                  <a:srgbClr val="FF0000"/>
+                </a:solidFill>
+              </a:rPr>
+              <a:t>SS loadings = “sums of squared loadings” = proportion of </a:t>
+            </a:r>
+            <a:br>
+              <a:rPr lang="en-GB" dirty="0">
+                <a:solidFill>
+                  <a:srgbClr val="FF0000"/>
+                </a:solidFill>
+              </a:rPr>
+            </a:br>
+            <a:r>
+              <a:rPr lang="en-GB" dirty="0">
+                <a:solidFill>
+                  <a:srgbClr val="FF0000"/>
+                </a:solidFill>
+              </a:rPr>
+              <a:t>total variance (across all items) captured by each component </a:t>
+            </a:r>
+            <a:r>
+              <a:rPr lang="en-GB" dirty="0">
+                <a:solidFill>
+                  <a:schemeClr val="accent6"/>
+                </a:solidFill>
+              </a:rPr>
+              <a:t>i.e., </a:t>
+            </a:r>
+            <a:r>
+              <a:rPr lang="en-GB" b="1" dirty="0">
+                <a:solidFill>
+                  <a:schemeClr val="accent6"/>
+                </a:solidFill>
+              </a:rPr>
+              <a:t>R</a:t>
+            </a:r>
+            <a:r>
+              <a:rPr lang="en-GB" b="1" baseline="30000" dirty="0">
+                <a:solidFill>
+                  <a:schemeClr val="accent6"/>
+                </a:solidFill>
+              </a:rPr>
+              <a:t>2</a:t>
+            </a:r>
+            <a:r>
+              <a:rPr lang="en-GB" b="1" baseline="-25000" dirty="0">
+                <a:solidFill>
+                  <a:schemeClr val="accent6"/>
+                </a:solidFill>
+              </a:rPr>
+              <a:t>Q1,PC1</a:t>
+            </a:r>
+            <a:r>
+              <a:rPr lang="en-GB" b="1" dirty="0">
+                <a:solidFill>
+                  <a:schemeClr val="accent6"/>
+                </a:solidFill>
+              </a:rPr>
+              <a:t> + R</a:t>
+            </a:r>
+            <a:r>
+              <a:rPr lang="en-GB" b="1" baseline="30000" dirty="0">
+                <a:solidFill>
+                  <a:schemeClr val="accent6"/>
+                </a:solidFill>
+              </a:rPr>
+              <a:t>2</a:t>
+            </a:r>
+            <a:r>
+              <a:rPr lang="en-GB" b="1" baseline="-25000" dirty="0">
+                <a:solidFill>
+                  <a:schemeClr val="accent6"/>
+                </a:solidFill>
+              </a:rPr>
+              <a:t>Q2,PC1</a:t>
+            </a:r>
+            <a:r>
+              <a:rPr lang="en-GB" b="1" dirty="0">
+                <a:solidFill>
+                  <a:schemeClr val="accent6"/>
+                </a:solidFill>
+              </a:rPr>
+              <a:t> + R</a:t>
+            </a:r>
+            <a:r>
+              <a:rPr lang="en-GB" b="1" baseline="30000" dirty="0">
+                <a:solidFill>
+                  <a:schemeClr val="accent6"/>
+                </a:solidFill>
+              </a:rPr>
+              <a:t>2</a:t>
+            </a:r>
+            <a:r>
+              <a:rPr lang="en-GB" b="1" baseline="-25000" dirty="0">
+                <a:solidFill>
+                  <a:schemeClr val="accent6"/>
+                </a:solidFill>
+              </a:rPr>
+              <a:t>Q3,PC1</a:t>
+            </a:r>
+            <a:r>
+              <a:rPr lang="en-GB" b="1" dirty="0">
+                <a:solidFill>
+                  <a:schemeClr val="accent6"/>
+                </a:solidFill>
+              </a:rPr>
+              <a:t> = 2.06</a:t>
+            </a:r>
+          </a:p>
+        </p:txBody>
+      </p:sp>
       <p:sp>
         <p:nvSpPr>
           <p:cNvPr id="11" name="Left Brace 10">
@@ -3850,6 +3913,58 @@
         <p:spPr>
           <a:xfrm>
             <a:off x="5632419" y="1889185"/>
+            <a:ext cx="155276" cy="1200328"/>
+          </a:xfrm>
+          <a:prstGeom prst="leftBrace">
+            <a:avLst>
+              <a:gd name="adj1" fmla="val 8333"/>
+              <a:gd name="adj2" fmla="val 52411"/>
+            </a:avLst>
+          </a:prstGeom>
+          <a:ln w="19050">
+            <a:solidFill>
+              <a:srgbClr val="FF0000"/>
+            </a:solidFill>
+          </a:ln>
+        </p:spPr>
+        <p:style>
+          <a:lnRef idx="1">
+            <a:schemeClr val="accent1"/>
+          </a:lnRef>
+          <a:fillRef idx="0">
+            <a:schemeClr val="accent1"/>
+          </a:fillRef>
+          <a:effectRef idx="0">
+            <a:schemeClr val="accent1"/>
+          </a:effectRef>
+          <a:fontRef idx="minor">
+            <a:schemeClr val="tx1"/>
+          </a:fontRef>
+        </p:style>
+        <p:txBody>
+          <a:bodyPr rtlCol="0" anchor="ctr"/>
+          <a:lstStyle/>
+          <a:p>
+            <a:pPr algn="ctr"/>
+            <a:endParaRPr lang="en-GB"/>
+          </a:p>
+        </p:txBody>
+      </p:sp>
+      <p:sp>
+        <p:nvSpPr>
+          <p:cNvPr id="12" name="Left Brace 11">
+            <a:extLst>
+              <a:ext uri="{FF2B5EF4-FFF2-40B4-BE49-F238E27FC236}">
+                <a16:creationId xmlns:a16="http://schemas.microsoft.com/office/drawing/2014/main" id="{4C69C180-DD28-4B88-8395-6A94CAFEFEBD}"/>
+              </a:ext>
+            </a:extLst>
+          </p:cNvPr>
+          <p:cNvSpPr/>
+          <p:nvPr/>
+        </p:nvSpPr>
+        <p:spPr>
+          <a:xfrm>
+            <a:off x="5940723" y="3282520"/>
             <a:ext cx="155276" cy="715470"/>
           </a:xfrm>
           <a:prstGeom prst="leftBrace">
@@ -3887,58 +4002,6 @@
           </a:p>
         </p:txBody>
       </p:sp>
-      <p:sp>
-        <p:nvSpPr>
-          <p:cNvPr id="12" name="Left Brace 11">
-            <a:extLst>
-              <a:ext uri="{FF2B5EF4-FFF2-40B4-BE49-F238E27FC236}">
-                <a16:creationId xmlns:a16="http://schemas.microsoft.com/office/drawing/2014/main" id="{4C69C180-DD28-4B88-8395-6A94CAFEFEBD}"/>
-              </a:ext>
-            </a:extLst>
-          </p:cNvPr>
-          <p:cNvSpPr/>
-          <p:nvPr/>
-        </p:nvSpPr>
-        <p:spPr>
-          <a:xfrm>
-            <a:off x="5632419" y="3262958"/>
-            <a:ext cx="155276" cy="715470"/>
-          </a:xfrm>
-          <a:prstGeom prst="leftBrace">
-            <a:avLst>
-              <a:gd name="adj1" fmla="val 8333"/>
-              <a:gd name="adj2" fmla="val 52411"/>
-            </a:avLst>
-          </a:prstGeom>
-          <a:ln w="19050">
-            <a:solidFill>
-              <a:srgbClr val="FF0000"/>
-            </a:solidFill>
-          </a:ln>
-        </p:spPr>
-        <p:style>
-          <a:lnRef idx="1">
-            <a:schemeClr val="accent1"/>
-          </a:lnRef>
-          <a:fillRef idx="0">
-            <a:schemeClr val="accent1"/>
-          </a:fillRef>
-          <a:effectRef idx="0">
-            <a:schemeClr val="accent1"/>
-          </a:effectRef>
-          <a:fontRef idx="minor">
-            <a:schemeClr val="tx1"/>
-          </a:fontRef>
-        </p:style>
-        <p:txBody>
-          <a:bodyPr rtlCol="0" anchor="ctr"/>
-          <a:lstStyle/>
-          <a:p>
-            <a:pPr algn="ctr"/>
-            <a:endParaRPr lang="en-GB"/>
-          </a:p>
-        </p:txBody>
-      </p:sp>
       <p:cxnSp>
         <p:nvCxnSpPr>
           <p:cNvPr id="14" name="Straight Arrow Connector 13">
@@ -3949,15 +4012,16 @@
             </a:extLst>
           </p:cNvPr>
           <p:cNvCxnSpPr>
+            <a:cxnSpLocks/>
             <a:stCxn id="11" idx="1"/>
             <a:endCxn id="7" idx="3"/>
           </p:cNvCxnSpPr>
           <p:nvPr/>
         </p:nvCxnSpPr>
         <p:spPr>
-          <a:xfrm flipH="1">
-            <a:off x="2648919" y="2264170"/>
-            <a:ext cx="2983500" cy="2780"/>
+          <a:xfrm flipH="1" flipV="1">
+            <a:off x="2648919" y="2189019"/>
+            <a:ext cx="2983500" cy="329270"/>
           </a:xfrm>
           <a:prstGeom prst="straightConnector1">
             <a:avLst/>
@@ -4001,8 +4065,8 @@
         </p:nvCxnSpPr>
         <p:spPr>
           <a:xfrm flipH="1">
-            <a:off x="4443083" y="3637943"/>
-            <a:ext cx="1189336" cy="0"/>
+            <a:off x="4443083" y="3657505"/>
+            <a:ext cx="1497640" cy="0"/>
           </a:xfrm>
           <a:prstGeom prst="straightConnector1">
             <a:avLst/>
@@ -4029,6 +4093,219 @@
           </a:fontRef>
         </p:style>
       </p:cxnSp>
+      <mc:AlternateContent xmlns:mc="http://schemas.openxmlformats.org/markup-compatibility/2006">
+        <mc:Choice xmlns:a14="http://schemas.microsoft.com/office/drawing/2010/main" Requires="a14">
+          <p:sp>
+            <p:nvSpPr>
+              <p:cNvPr id="3" name="TextBox 2">
+                <a:extLst>
+                  <a:ext uri="{FF2B5EF4-FFF2-40B4-BE49-F238E27FC236}">
+                    <a16:creationId xmlns:a16="http://schemas.microsoft.com/office/drawing/2014/main" id="{30BBFC30-CD3D-0D98-051A-57374ADB9EC4}"/>
+                  </a:ext>
+                </a:extLst>
+              </p:cNvPr>
+              <p:cNvSpPr txBox="1"/>
+              <p:nvPr/>
+            </p:nvSpPr>
+            <p:spPr>
+              <a:xfrm>
+                <a:off x="9159403" y="4985826"/>
+                <a:ext cx="6094562" cy="500650"/>
+              </a:xfrm>
+              <a:prstGeom prst="rect">
+                <a:avLst/>
+              </a:prstGeom>
+              <a:noFill/>
+            </p:spPr>
+            <p:txBody>
+              <a:bodyPr wrap="square">
+                <a:spAutoFit/>
+              </a:bodyPr>
+              <a:lstStyle/>
+              <a:p>
+                <a:pPr marL="285750" indent="-285750">
+                  <a:buFontTx/>
+                  <a:buChar char="-"/>
+                </a:pPr>
+                <a:r>
+                  <a:rPr lang="en-GB" sz="1200" b="0" dirty="0">
+                    <a:solidFill>
+                      <a:schemeClr val="accent6"/>
+                    </a:solidFill>
+                  </a:rPr>
+                  <a:t>SS loadings = </a:t>
+                </a:r>
+                <a14:m>
+                  <m:oMath xmlns:m="http://schemas.openxmlformats.org/officeDocument/2006/math">
+                    <m:r>
+                      <a:rPr lang="en-GB" sz="1200" b="0" i="1" smtClean="0">
+                        <a:solidFill>
+                          <a:schemeClr val="accent6"/>
+                        </a:solidFill>
+                        <a:latin typeface="Cambria Math" panose="02040503050406030204" pitchFamily="18" charset="0"/>
+                      </a:rPr>
+                      <m:t>𝑒𝑖𝑔𝑒𝑛𝑣𝑎𝑙𝑢𝑒𝑠</m:t>
+                    </m:r>
+                  </m:oMath>
+                </a14:m>
+                <a:endParaRPr lang="en-GB" sz="1200" b="0" i="1" dirty="0">
+                  <a:solidFill>
+                    <a:schemeClr val="accent6"/>
+                  </a:solidFill>
+                  <a:latin typeface="Cambria Math" panose="02040503050406030204" pitchFamily="18" charset="0"/>
+                </a:endParaRPr>
+              </a:p>
+              <a:p>
+                <a:pPr marL="285750" indent="-285750">
+                  <a:buFontTx/>
+                  <a:buChar char="-"/>
+                </a:pPr>
+                <a:r>
+                  <a:rPr lang="en-GB" sz="1200" b="0" dirty="0">
+                    <a:solidFill>
+                      <a:schemeClr val="accent6"/>
+                    </a:solidFill>
+                  </a:rPr>
+                  <a:t>Loadings = </a:t>
+                </a:r>
+                <a14:m>
+                  <m:oMath xmlns:m="http://schemas.openxmlformats.org/officeDocument/2006/math">
+                    <m:r>
+                      <a:rPr lang="en-GB" sz="1200" b="0" i="1" smtClean="0">
+                        <a:solidFill>
+                          <a:schemeClr val="accent6"/>
+                        </a:solidFill>
+                        <a:latin typeface="Cambria Math" panose="02040503050406030204" pitchFamily="18" charset="0"/>
+                      </a:rPr>
+                      <m:t>𝑒𝑖𝑔𝑒𝑛𝑣𝑒𝑐𝑡𝑜𝑟</m:t>
+                    </m:r>
+                    <m:r>
+                      <a:rPr lang="en-GB" sz="1200" i="1" smtClean="0">
+                        <a:solidFill>
+                          <a:schemeClr val="accent6"/>
+                        </a:solidFill>
+                        <a:latin typeface="Cambria Math" panose="02040503050406030204" pitchFamily="18" charset="0"/>
+                        <a:ea typeface="Cambria Math" panose="02040503050406030204" pitchFamily="18" charset="0"/>
+                      </a:rPr>
+                      <m:t>×</m:t>
+                    </m:r>
+                    <m:rad>
+                      <m:radPr>
+                        <m:degHide m:val="on"/>
+                        <m:ctrlPr>
+                          <a:rPr lang="en-GB" sz="1200" i="1" smtClean="0">
+                            <a:solidFill>
+                              <a:schemeClr val="accent6"/>
+                            </a:solidFill>
+                            <a:latin typeface="Cambria Math" panose="02040503050406030204" pitchFamily="18" charset="0"/>
+                          </a:rPr>
+                        </m:ctrlPr>
+                      </m:radPr>
+                      <m:deg/>
+                      <m:e>
+                        <m:r>
+                          <a:rPr lang="en-GB" sz="1200" b="0" i="1" smtClean="0">
+                            <a:solidFill>
+                              <a:schemeClr val="accent6"/>
+                            </a:solidFill>
+                            <a:latin typeface="Cambria Math" panose="02040503050406030204" pitchFamily="18" charset="0"/>
+                          </a:rPr>
+                          <m:t>𝑒𝑖𝑔𝑒𝑛𝑣𝑎𝑙𝑢𝑒</m:t>
+                        </m:r>
+                      </m:e>
+                    </m:rad>
+                  </m:oMath>
+                </a14:m>
+                <a:endParaRPr lang="en-GB" sz="1200" dirty="0">
+                  <a:solidFill>
+                    <a:schemeClr val="accent6"/>
+                  </a:solidFill>
+                </a:endParaRPr>
+              </a:p>
+            </p:txBody>
+          </p:sp>
+        </mc:Choice>
+        <mc:Fallback>
+          <p:sp>
+            <p:nvSpPr>
+              <p:cNvPr id="3" name="TextBox 2">
+                <a:extLst>
+                  <a:ext uri="{FF2B5EF4-FFF2-40B4-BE49-F238E27FC236}">
+                    <a16:creationId xmlns:a16="http://schemas.microsoft.com/office/drawing/2014/main" id="{30BBFC30-CD3D-0D98-051A-57374ADB9EC4}"/>
+                  </a:ext>
+                </a:extLst>
+              </p:cNvPr>
+              <p:cNvSpPr txBox="1">
+                <a:spLocks noRot="1" noChangeAspect="1" noMove="1" noResize="1" noEditPoints="1" noAdjustHandles="1" noChangeArrowheads="1" noChangeShapeType="1" noTextEdit="1"/>
+              </p:cNvSpPr>
+              <p:nvPr/>
+            </p:nvSpPr>
+            <p:spPr>
+              <a:xfrm>
+                <a:off x="9159403" y="4985826"/>
+                <a:ext cx="6094562" cy="500650"/>
+              </a:xfrm>
+              <a:prstGeom prst="rect">
+                <a:avLst/>
+              </a:prstGeom>
+              <a:blipFill>
+                <a:blip r:embed="rId3"/>
+                <a:stretch>
+                  <a:fillRect l="-100" t="-1220" b="-7317"/>
+                </a:stretch>
+              </a:blipFill>
+            </p:spPr>
+            <p:txBody>
+              <a:bodyPr/>
+              <a:lstStyle/>
+              <a:p>
+                <a:r>
+                  <a:rPr lang="en-GB">
+                    <a:noFill/>
+                  </a:rPr>
+                  <a:t> </a:t>
+                </a:r>
+              </a:p>
+            </p:txBody>
+          </p:sp>
+        </mc:Fallback>
+      </mc:AlternateContent>
+      <p:pic>
+        <p:nvPicPr>
+          <p:cNvPr id="13" name="Picture 12">
+            <a:extLst>
+              <a:ext uri="{FF2B5EF4-FFF2-40B4-BE49-F238E27FC236}">
+                <a16:creationId xmlns:a16="http://schemas.microsoft.com/office/drawing/2014/main" id="{FD6A81C4-F120-F8F6-3046-638E277D0740}"/>
+              </a:ext>
+            </a:extLst>
+          </p:cNvPr>
+          <p:cNvPicPr>
+            <a:picLocks noChangeAspect="1"/>
+          </p:cNvPicPr>
+          <p:nvPr/>
+        </p:nvPicPr>
+        <p:blipFill>
+          <a:blip r:embed="rId4">
+            <a:extLst>
+              <a:ext uri="{28A0092B-C50C-407E-A947-70E740481C1C}">
+                <a14:useLocalDpi xmlns:a14="http://schemas.microsoft.com/office/drawing/2010/main" val="0"/>
+              </a:ext>
+            </a:extLst>
+          </a:blip>
+          <a:stretch>
+            <a:fillRect/>
+          </a:stretch>
+        </p:blipFill>
+        <p:spPr>
+          <a:xfrm>
+            <a:off x="8844892" y="4872460"/>
+            <a:ext cx="629022" cy="588764"/>
+          </a:xfrm>
+          <a:prstGeom prst="rect">
+            <a:avLst/>
+          </a:prstGeom>
+        </p:spPr>
+      </p:pic>
     </p:spTree>
     <p:extLst>
       <p:ext uri="{BB962C8B-B14F-4D97-AF65-F5344CB8AC3E}">
